--- a/dist/초4/국어/읽기와요약/초4_국어_읽기와요약_01_문단과문단의관계.pptx
+++ b/dist/초4/국어/읽기와요약/초4_국어_읽기와요약_01_문단과문단의관계.pptx
@@ -121,13 +121,13 @@
   <p:extLst>
     <p:ext uri="{521415D9-36F7-43E2-AB2F-B90AF26B5E84}">
       <p14:sectionLst xmlns:p14="http://schemas.microsoft.com/office/powerpoint/2010/main">
-        <p14:section name="도입" id="{434f19a5-cb7c-d5e9-2234-7c0ef6c2d229}">
+        <p14:section name="도입" id="{d783ec3e-ed4b-b5b9-50f2-51f22be12d68}">
           <p14:sldIdLst>
             <p14:sldId id="256"/>
             <p14:sldId id="257"/>
           </p14:sldIdLst>
         </p14:section>
-        <p14:section name="개념" id="{90cebbd6-dd7a-4dcd-f120-eeccd00b5990}">
+        <p14:section name="개념" id="{b6b4d346-0c3a-e442-0ebb-7f8cf27885f7}">
           <p14:sldIdLst>
             <p14:sldId id="258"/>
             <p14:sldId id="259"/>
@@ -136,26 +136,26 @@
             <p14:sldId id="262"/>
           </p14:sldIdLst>
         </p14:section>
-        <p14:section name="연습" id="{b7f6e21b-1d26-d119-9aa9-0bbfad74e5ff}">
+        <p14:section name="연습" id="{422f1b61-69af-7579-5f7e-7775dfd6c6da}">
           <p14:sldIdLst>
             <p14:sldId id="263"/>
             <p14:sldId id="264"/>
             <p14:sldId id="265"/>
           </p14:sldIdLst>
         </p14:section>
-        <p14:section name="확인" id="{c4d497a1-855f-1963-c8d1-df2c68fec802}">
+        <p14:section name="확인" id="{770f5195-1bb2-bcb4-add0-8ae114d888f8}">
           <p14:sldIdLst>
             <p14:sldId id="266"/>
             <p14:sldId id="267"/>
             <p14:sldId id="268"/>
           </p14:sldIdLst>
         </p14:section>
-        <p14:section name="정리" id="{1867c0f4-ec20-1c4a-9271-ff73fc172d7a}">
+        <p14:section name="정리" id="{99b08365-a188-2db9-f6f0-f4f401ebca6d}">
           <p14:sldIdLst>
             <p14:sldId id="269"/>
           </p14:sldIdLst>
         </p14:section>
-        <p14:section name="보충" id="{7c0c427a-403f-0597-6bb1-a738e107508a}">
+        <p14:section name="보충" id="{b37b350c-b02a-2445-deb9-166eca67df64}">
           <p14:sldIdLst>
             <p14:sldId id="270"/>
           </p14:sldIdLst>
@@ -7008,7 +7008,7 @@
           </p:nvPr>
         </p:nvGraphicFramePr>
         <p:xfrm>
-          <a:off x="836676" y="2166620"/>
+          <a:off x="836676" y="2199640"/>
           <a:ext cx="10515600" cy="914400"/>
         </p:xfrm>
         <a:graphic>
@@ -7020,7 +7020,7 @@
                 <a:gridCol w="2103120"/>
                 <a:gridCol w="7255764"/>
               </a:tblGrid>
-              <a:tr h="528320">
+              <a:tr h="511810">
                 <a:tc>
                   <a:txBody>
                     <a:bodyPr/>
@@ -7226,7 +7226,7 @@
                   </a:tcPr>
                 </a:tc>
               </a:tr>
-              <a:tr h="528320">
+              <a:tr h="511810">
                 <a:tc>
                   <a:txBody>
                     <a:bodyPr/>
@@ -7421,7 +7421,7 @@
                   </a:tcPr>
                 </a:tc>
               </a:tr>
-              <a:tr h="528320">
+              <a:tr h="511810">
                 <a:tc>
                   <a:txBody>
                     <a:bodyPr/>
@@ -7627,7 +7627,7 @@
                   </a:tcPr>
                 </a:tc>
               </a:tr>
-              <a:tr h="528320">
+              <a:tr h="511810">
                 <a:tc>
                   <a:txBody>
                     <a:bodyPr/>

--- a/dist/초4/국어/읽기와요약/초4_국어_읽기와요약_01_문단과문단의관계.pptx
+++ b/dist/초4/국어/읽기와요약/초4_국어_읽기와요약_01_문단과문단의관계.pptx
@@ -121,13 +121,13 @@
   <p:extLst>
     <p:ext uri="{521415D9-36F7-43E2-AB2F-B90AF26B5E84}">
       <p14:sectionLst xmlns:p14="http://schemas.microsoft.com/office/powerpoint/2010/main">
-        <p14:section name="도입" id="{d783ec3e-ed4b-b5b9-50f2-51f22be12d68}">
+        <p14:section name="도입" id="{7a46818d-727c-921e-83e1-d586ff06ba90}">
           <p14:sldIdLst>
             <p14:sldId id="256"/>
             <p14:sldId id="257"/>
           </p14:sldIdLst>
         </p14:section>
-        <p14:section name="개념" id="{b6b4d346-0c3a-e442-0ebb-7f8cf27885f7}">
+        <p14:section name="개념" id="{c46b144e-a53c-3a70-7aa8-ed19af2c0f22}">
           <p14:sldIdLst>
             <p14:sldId id="258"/>
             <p14:sldId id="259"/>
@@ -136,26 +136,26 @@
             <p14:sldId id="262"/>
           </p14:sldIdLst>
         </p14:section>
-        <p14:section name="연습" id="{422f1b61-69af-7579-5f7e-7775dfd6c6da}">
+        <p14:section name="연습" id="{3b304f9e-58b8-32b8-4dec-2808d1fb025a}">
           <p14:sldIdLst>
             <p14:sldId id="263"/>
             <p14:sldId id="264"/>
             <p14:sldId id="265"/>
           </p14:sldIdLst>
         </p14:section>
-        <p14:section name="확인" id="{770f5195-1bb2-bcb4-add0-8ae114d888f8}">
+        <p14:section name="확인" id="{ff97f615-f858-c3f4-d3c9-000fdb2166f6}">
           <p14:sldIdLst>
             <p14:sldId id="266"/>
             <p14:sldId id="267"/>
             <p14:sldId id="268"/>
           </p14:sldIdLst>
         </p14:section>
-        <p14:section name="정리" id="{99b08365-a188-2db9-f6f0-f4f401ebca6d}">
+        <p14:section name="정리" id="{b6f10868-ef97-3650-ffd8-ed332881d6c4}">
           <p14:sldIdLst>
             <p14:sldId id="269"/>
           </p14:sldIdLst>
         </p14:section>
-        <p14:section name="보충" id="{b37b350c-b02a-2445-deb9-166eca67df64}">
+        <p14:section name="보충" id="{e8afcd2d-87f0-6035-56cb-605cbf21f9ac}">
           <p14:sldIdLst>
             <p14:sldId id="270"/>
           </p14:sldIdLst>
